--- a/media/resources/files/EkiOrunduuOnduktar_KOBOYTUU_BOLUU_1234_2H9Daev.pptx
+++ b/media/resources/files/EkiOrunduuOnduktar_KOBOYTUU_BOLUU_1234_2H9Daev.pptx
@@ -4851,7 +4851,7 @@
                 <a:ea typeface="+mn-ea"/>
                 <a:cs typeface="+mn-cs"/>
               </a:rPr>
-              <a:t>Турдуу пикирлер учун ыраазычылык билдиребиз.</a:t>
+              <a:t>Түрдүү пикирлер үчүн ыраазычылык билдиребиз.</a:t>
             </a:r>
           </a:p>
           <a:p>

--- a/media/resources/files/EkiOrunduuOnduktar_KOBOYTUU_BOLUU_1234_2H9Daev.pptx
+++ b/media/resources/files/EkiOrunduuOnduktar_KOBOYTUU_BOLUU_1234_2H9Daev.pptx
@@ -2417,7 +2417,7 @@
             <a:pPr algn="ctr"/>
             <a:r>
               <a:rPr lang="en-GB" sz="2000" dirty="0"/>
-              <a:t>7.2 × 0.1</a:t>
+              <a:t>7,2 × 0,1</a:t>
             </a:r>
           </a:p>
         </p:txBody>
@@ -2648,7 +2648,7 @@
             <a:pPr algn="ctr"/>
             <a:r>
               <a:rPr lang="en-GB" sz="2000" dirty="0"/>
-              <a:t>4.5 × 1.1</a:t>
+              <a:t>4,5 × 1,1</a:t>
             </a:r>
           </a:p>
         </p:txBody>
@@ -2723,7 +2723,7 @@
             <a:pPr algn="ctr"/>
             <a:r>
               <a:rPr lang="en-GB" sz="2000" dirty="0"/>
-              <a:t>0.58 × 0.12</a:t>
+              <a:t>0,58 × 0,12</a:t>
             </a:r>
           </a:p>
         </p:txBody>
@@ -2798,7 +2798,7 @@
             <a:pPr algn="ctr"/>
             <a:r>
               <a:rPr lang="en-GB" sz="2000" dirty="0"/>
-              <a:t>1.42 × 0.46</a:t>
+              <a:t>1,42 × 0,46</a:t>
             </a:r>
           </a:p>
         </p:txBody>
@@ -2873,7 +2873,7 @@
             <a:pPr algn="ctr"/>
             <a:r>
               <a:rPr lang="en-GB" sz="2000" dirty="0"/>
-              <a:t>9 ÷ 0.01</a:t>
+              <a:t>9 ÷ 0,01</a:t>
             </a:r>
           </a:p>
         </p:txBody>
@@ -2909,7 +2909,7 @@
             <a:pPr algn="ctr"/>
             <a:r>
               <a:rPr lang="en-GB" sz="2000" dirty="0"/>
-              <a:t>14 ÷ 0.07</a:t>
+              <a:t>14 ÷ 0,07</a:t>
             </a:r>
           </a:p>
         </p:txBody>
@@ -2945,7 +2945,7 @@
             <a:pPr algn="ctr"/>
             <a:r>
               <a:rPr lang="en-GB" sz="2000" dirty="0"/>
-              <a:t>4.25 ÷ 0.17</a:t>
+              <a:t>4,25 ÷ 0,17</a:t>
             </a:r>
           </a:p>
         </p:txBody>
@@ -2981,7 +2981,7 @@
             <a:pPr algn="ctr"/>
             <a:r>
               <a:rPr lang="en-GB" sz="2000" dirty="0"/>
-              <a:t>13.23 ÷ 0.42</a:t>
+              <a:t>13,23 ÷ 0,42</a:t>
             </a:r>
           </a:p>
         </p:txBody>
@@ -3141,7 +3141,7 @@
             <a:pPr algn="ctr"/>
             <a:r>
               <a:rPr lang="en-GB" sz="2000" dirty="0"/>
-              <a:t>7.2 × 0.1</a:t>
+              <a:t>7,2 × 0,1</a:t>
             </a:r>
           </a:p>
         </p:txBody>
@@ -3381,7 +3381,7 @@
             <a:pPr algn="just"/>
             <a:r>
               <a:rPr lang="en-GB" sz="2000" dirty="0"/>
-              <a:t>0.72</a:t>
+              <a:t>0,72</a:t>
             </a:r>
           </a:p>
         </p:txBody>
@@ -3417,7 +3417,7 @@
             <a:pPr algn="ctr"/>
             <a:r>
               <a:rPr lang="en-GB" sz="2000" dirty="0"/>
-              <a:t>4.5 × 1.1</a:t>
+              <a:t>4,5 × 1,1</a:t>
             </a:r>
           </a:p>
         </p:txBody>
@@ -3501,7 +3501,7 @@
             <a:pPr algn="just"/>
             <a:r>
               <a:rPr lang="en-GB" sz="2000" dirty="0"/>
-              <a:t>4.95</a:t>
+              <a:t>4,95</a:t>
             </a:r>
           </a:p>
         </p:txBody>
@@ -3537,7 +3537,7 @@
             <a:pPr algn="ctr"/>
             <a:r>
               <a:rPr lang="en-GB" sz="2000" dirty="0"/>
-              <a:t>0.58 × 0.12</a:t>
+              <a:t>0,58 × 0,12</a:t>
             </a:r>
           </a:p>
         </p:txBody>
@@ -3621,7 +3621,7 @@
             <a:pPr algn="just"/>
             <a:r>
               <a:rPr lang="en-GB" sz="2000" dirty="0"/>
-              <a:t>0.0696</a:t>
+              <a:t>0,0696</a:t>
             </a:r>
           </a:p>
         </p:txBody>
@@ -3657,7 +3657,7 @@
             <a:pPr algn="ctr"/>
             <a:r>
               <a:rPr lang="en-GB" sz="2000" dirty="0"/>
-              <a:t>1.42 × 0.46</a:t>
+              <a:t>1,42 × 0,46</a:t>
             </a:r>
           </a:p>
         </p:txBody>
@@ -3741,7 +3741,7 @@
             <a:pPr algn="just"/>
             <a:r>
               <a:rPr lang="en-GB" sz="2000" dirty="0"/>
-              <a:t>0.6532</a:t>
+              <a:t>0,6532</a:t>
             </a:r>
           </a:p>
         </p:txBody>
@@ -3777,7 +3777,7 @@
             <a:pPr algn="ctr"/>
             <a:r>
               <a:rPr lang="en-GB" sz="2000" dirty="0"/>
-              <a:t>9 ÷ 0.01</a:t>
+              <a:t>9 ÷ 0,01</a:t>
             </a:r>
           </a:p>
         </p:txBody>
@@ -3858,7 +3858,7 @@
             <a:pPr algn="ctr"/>
             <a:r>
               <a:rPr lang="en-GB" sz="2000" dirty="0"/>
-              <a:t>14 ÷ 0.07</a:t>
+              <a:t>14 ÷ 0,07</a:t>
             </a:r>
           </a:p>
         </p:txBody>
@@ -3939,7 +3939,7 @@
             <a:pPr algn="ctr"/>
             <a:r>
               <a:rPr lang="en-GB" sz="2000" dirty="0"/>
-              <a:t>4.25 ÷ 0.17</a:t>
+              <a:t>4,25 ÷ 0,17</a:t>
             </a:r>
           </a:p>
         </p:txBody>
@@ -4020,7 +4020,7 @@
             <a:pPr algn="ctr"/>
             <a:r>
               <a:rPr lang="en-GB" sz="2000" dirty="0"/>
-              <a:t>13.23 ÷ 0.42</a:t>
+              <a:t>13,23 ÷ 0,42</a:t>
             </a:r>
           </a:p>
         </p:txBody>
@@ -4065,7 +4065,7 @@
             <a:pPr algn="just"/>
             <a:r>
               <a:rPr lang="en-GB" sz="2000" dirty="0"/>
-              <a:t>31.5</a:t>
+              <a:t>31,5</a:t>
             </a:r>
           </a:p>
         </p:txBody>
